--- a/Lab 3.a - Allestimento di Nginx, Certbot e Reti in Locale.pptx
+++ b/Lab 3.a - Allestimento di Nginx, Certbot e Reti in Locale.pptx
@@ -8633,7 +8633,7 @@
             </a:r>
             <a:r>
               <a:rPr lang="it-IT" dirty="0"/>
-              <a:t> (React): L'interfaccia utente con il form di registrazione dei prodotti.</a:t>
+              <a:t>: L'interfaccia utente con il form di registrazione dei prodotti.</a:t>
             </a:r>
           </a:p>
           <a:p>
@@ -9925,8 +9925,12 @@
               <a:t>Frontend</a:t>
             </a:r>
             <a:r>
-              <a:rPr lang="it-IT" dirty="0"/>
-              <a:t> React in Locale</a:t>
+              <a:rPr lang="it-IT"/>
+              <a:t> in </a:t>
+            </a:r>
+            <a:r>
+              <a:rPr lang="it-IT" dirty="0"/>
+              <a:t>Locale</a:t>
             </a:r>
           </a:p>
         </p:txBody>
@@ -19621,15 +19625,6 @@
 </file>
 
 <file path=customXml/item1.xml><?xml version="1.0" encoding="utf-8"?>
-<?mso-contentType ?>
-<FormTemplates xmlns="http://schemas.microsoft.com/sharepoint/v3/contenttype/forms">
-  <Display>DocumentLibraryForm</Display>
-  <Edit>DocumentLibraryForm</Edit>
-  <New>DocumentLibraryForm</New>
-</FormTemplates>
-</file>
-
-<file path=customXml/item2.xml><?xml version="1.0" encoding="utf-8"?>
 <p:properties xmlns:p="http://schemas.microsoft.com/office/2006/metadata/properties" xmlns:xsi="http://www.w3.org/2001/XMLSchema-instance" xmlns:pc="http://schemas.microsoft.com/office/infopath/2007/PartnerControls">
   <documentManagement>
     <TaxCatchAll xmlns="21b72fd8-e7d0-49ac-9795-d1b0bc6b7e1c" xsi:nil="true"/>
@@ -19639,6 +19634,15 @@
     <Argomento xmlns="8b3acf13-3a58-43b2-a29e-f23503de136d" xsi:nil="true"/>
   </documentManagement>
 </p:properties>
+</file>
+
+<file path=customXml/item2.xml><?xml version="1.0" encoding="utf-8"?>
+<?mso-contentType ?>
+<FormTemplates xmlns="http://schemas.microsoft.com/sharepoint/v3/contenttype/forms">
+  <Display>DocumentLibraryForm</Display>
+  <Edit>DocumentLibraryForm</Edit>
+  <New>DocumentLibraryForm</New>
+</FormTemplates>
 </file>
 
 <file path=customXml/item3.xml><?xml version="1.0" encoding="utf-8"?>
@@ -19893,20 +19897,20 @@
 </file>
 
 <file path=customXml/itemProps1.xml><?xml version="1.0" encoding="utf-8"?>
-<ds:datastoreItem xmlns:ds="http://schemas.openxmlformats.org/officeDocument/2006/customXml" ds:itemID="{67C65656-B2D8-4C19-A873-091B25A5212E}">
-  <ds:schemaRefs>
-    <ds:schemaRef ds:uri="http://schemas.microsoft.com/sharepoint/v3/contenttype/forms"/>
-  </ds:schemaRefs>
-</ds:datastoreItem>
-</file>
-
-<file path=customXml/itemProps2.xml><?xml version="1.0" encoding="utf-8"?>
 <ds:datastoreItem xmlns:ds="http://schemas.openxmlformats.org/officeDocument/2006/customXml" ds:itemID="{6766878A-54ED-4867-B478-72A29DC19B89}">
   <ds:schemaRefs>
     <ds:schemaRef ds:uri="http://schemas.microsoft.com/office/2006/metadata/properties"/>
     <ds:schemaRef ds:uri="http://schemas.microsoft.com/office/infopath/2007/PartnerControls"/>
     <ds:schemaRef ds:uri="21b72fd8-e7d0-49ac-9795-d1b0bc6b7e1c"/>
     <ds:schemaRef ds:uri="8b3acf13-3a58-43b2-a29e-f23503de136d"/>
+  </ds:schemaRefs>
+</ds:datastoreItem>
+</file>
+
+<file path=customXml/itemProps2.xml><?xml version="1.0" encoding="utf-8"?>
+<ds:datastoreItem xmlns:ds="http://schemas.openxmlformats.org/officeDocument/2006/customXml" ds:itemID="{67C65656-B2D8-4C19-A873-091B25A5212E}">
+  <ds:schemaRefs>
+    <ds:schemaRef ds:uri="http://schemas.microsoft.com/sharepoint/v3/contenttype/forms"/>
   </ds:schemaRefs>
 </ds:datastoreItem>
 </file>
